--- a/index/designs/y9-l8/l3-rooms-floors/l3-rooms-floors.pptx
+++ b/index/designs/y9-l8/l3-rooms-floors/l3-rooms-floors.pptx
@@ -2688,7 +2688,7 @@
                 <a:ea typeface="Noto Sans SC" pitchFamily="34" charset="-122"/>
                 <a:cs typeface="Noto Sans SC" pitchFamily="34" charset="-120"/>
               </a:rPr>
-              <a:t>CD Track 31</a:t>
+              <a:t>Track 31</a:t>
             </a:r>
             <a:endParaRPr lang="en-US" sz="1100" dirty="0"/>
           </a:p>
@@ -3105,7 +3105,7 @@
                 <a:ea typeface="Noto Sans SC" pitchFamily="34" charset="-122"/>
                 <a:cs typeface="Noto Sans SC" pitchFamily="34" charset="-120"/>
               </a:rPr>
-              <a:t>▶ CD Track 31</a:t>
+              <a:t>▶ Track 31</a:t>
             </a:r>
             <a:endParaRPr lang="en-US" sz="750" dirty="0"/>
           </a:p>
@@ -3218,7 +3218,7 @@
                 <a:ea typeface="Noto Sans SC" pitchFamily="34" charset="-122"/>
                 <a:cs typeface="Noto Sans SC" pitchFamily="34" charset="-120"/>
               </a:rPr>
-              <a:t>播放 CD Track 31，拼音可见，学生默默跟听。</a:t>
+              <a:t>播放 Track 31，拼音可见，学生默默跟听。</a:t>
             </a:r>
             <a:endParaRPr lang="en-US" sz="900" dirty="0"/>
           </a:p>
@@ -22304,7 +22304,7 @@
                 <a:ea typeface="Noto Sans SC" pitchFamily="34" charset="-122"/>
                 <a:cs typeface="Noto Sans SC" pitchFamily="34" charset="-120"/>
               </a:rPr>
-              <a:t>▶ CD Track 31</a:t>
+              <a:t>▶ Track 31</a:t>
             </a:r>
             <a:endParaRPr lang="en-US" sz="900" dirty="0"/>
           </a:p>
@@ -23711,7 +23711,7 @@
                 <a:ea typeface="Noto Sans SC" pitchFamily="34" charset="-122"/>
                 <a:cs typeface="Noto Sans SC" pitchFamily="34" charset="-120"/>
               </a:rPr>
-              <a:t>教师朗读一遍课文（角色分明），全班跟看拼音；播放 CD Track 31。今天可用英文作答，欢迎流利的学生用中文复述。</a:t>
+              <a:t>教师朗读一遍课文（角色分明），全班跟看拼音；播放 Track 31。今天可用英文作答，欢迎流利的学生用中文复述。</a:t>
             </a:r>
             <a:endParaRPr lang="en-US" sz="800" dirty="0"/>
           </a:p>

--- a/index/designs/y9-l8/l3-rooms-floors/l3-rooms-floors.pptx
+++ b/index/designs/y9-l8/l3-rooms-floors/l3-rooms-floors.pptx
@@ -2395,9 +2395,6 @@
               </a:rPr>
               <a:t>⏱ </a:t>
             </a:r>
-            <a:pPr algn="l" indent="0" marL="0">
-              <a:buNone/>
-            </a:pPr>
             <a:r>
               <a:rPr lang="en-US" sz="1100" b="1" dirty="0">
                 <a:solidFill>
@@ -2484,9 +2481,6 @@
               </a:rPr>
               <a:t>🏫 </a:t>
             </a:r>
-            <a:pPr algn="l" indent="0" marL="0">
-              <a:buNone/>
-            </a:pPr>
             <a:r>
               <a:rPr lang="en-US" sz="1100" b="1" dirty="0">
                 <a:solidFill>
@@ -2573,9 +2567,6 @@
               </a:rPr>
               <a:t>📚 </a:t>
             </a:r>
-            <a:pPr algn="l" indent="0" marL="0">
-              <a:buNone/>
-            </a:pPr>
             <a:r>
               <a:rPr lang="en-US" sz="1100" b="1" dirty="0">
                 <a:solidFill>
@@ -2587,9 +2578,6 @@
               </a:rPr>
               <a:t>轻松学中文 Book 3</a:t>
             </a:r>
-            <a:pPr algn="l" indent="0" marL="0">
-              <a:buNone/>
-            </a:pPr>
             <a:r>
               <a:rPr lang="en-US" sz="1100" dirty="0">
                 <a:solidFill>
@@ -2676,9 +2664,6 @@
               </a:rPr>
               <a:t>🎧 </a:t>
             </a:r>
-            <a:pPr algn="l" indent="0" marL="0">
-              <a:buNone/>
-            </a:pPr>
             <a:r>
               <a:rPr lang="en-US" sz="1100" b="1" dirty="0">
                 <a:solidFill>
@@ -12882,12 +12867,6 @@
               </a:rPr>
               <a:t>对 </a:t>
             </a:r>
-            <a:pPr algn="l" indent="0" marL="0">
-              <a:lnSpc>
-                <a:spcPts val="1400"/>
-              </a:lnSpc>
-              <a:buNone/>
-            </a:pPr>
             <a:r>
               <a:rPr lang="en-US" sz="1000" b="1" dirty="0">
                 <a:solidFill>
@@ -12899,12 +12878,6 @@
               </a:rPr>
               <a:t>室</a:t>
             </a:r>
-            <a:pPr algn="l" indent="0" marL="0">
-              <a:lnSpc>
-                <a:spcPts val="1400"/>
-              </a:lnSpc>
-              <a:buNone/>
-            </a:pPr>
             <a:r>
               <a:rPr lang="en-US" sz="1000" dirty="0">
                 <a:solidFill>
